--- a/week-04/presentations/ppts/day-05-technical-tradeoffs-constraints.pptx
+++ b/week-04/presentations/ppts/day-05-technical-tradeoffs-constraints.pptx
@@ -7666,16 +7666,7 @@
             </a:pPr>
             <a:r>
               <a:rPr/>
-              <a:t>“We considered microservices but chose monolith.”</a:t>
-            </a:r>
-          </a:p>
-          <a:p>
-            <a:pPr lvl="0" indent="0" marL="0">
-              <a:buNone/>
-            </a:pPr>
-            <a:r>
-              <a:rPr/>
-              <a:t>Description, not trade-off.</a:t>
+              <a:t>“We considered microservices but chose monolith.” Description, not trade-off.</a:t>
             </a:r>
           </a:p>
           <a:p>

--- a/week-04/presentations/ppts/day-05-technical-tradeoffs-constraints.pptx
+++ b/week-04/presentations/ppts/day-05-technical-tradeoffs-constraints.pptx
@@ -6994,16 +6994,16 @@
             </a:pPr>
             <a:r>
               <a:rPr/>
-              <a:t>STRIDE threat model + revised security NFRs</a:t>
-            </a:r>
-          </a:p>
-          <a:p>
-            <a:pPr lvl="0" indent="0" marL="0">
-              <a:buNone/>
-            </a:pPr>
-            <a:r>
-              <a:rPr/>
-              <a:t>Three SLOs + latency budget + rate limits</a:t>
+              <a:t>STRIDE threat model + security NFRs</a:t>
+            </a:r>
+          </a:p>
+          <a:p>
+            <a:pPr lvl="0" indent="0" marL="0">
+              <a:buNone/>
+            </a:pPr>
+            <a:r>
+              <a:rPr/>
+              <a:t>Three SLOs + latency budget</a:t>
             </a:r>
           </a:p>
           <a:p>
@@ -7030,7 +7030,7 @@
             </a:pPr>
             <a:r>
               <a:rPr/>
-              <a:t>Integrated TCD — sibling to PRD</a:t>
+              <a:t>Integrated TCD</a:t>
             </a:r>
           </a:p>
           <a:p>
@@ -7084,7 +7084,7 @@
             </a:pPr>
             <a:r>
               <a:rPr/>
-              <a:t>Performance baselines &amp; monitoring</a:t>
+              <a:t>Perf baselines &amp; monitoring</a:t>
             </a:r>
           </a:p>
           <a:p>
@@ -7102,7 +7102,7 @@
             </a:pPr>
             <a:r>
               <a:rPr/>
-              <a:t>Bring to Monday: Your TCD + your PRD. The TCD’s component map drives Week 5’s data modeling; the SLOs drive performance baselines.</a:t>
+              <a:t>Bring to Monday: your TCD + PRD. The component map drives Week 5 data modeling; the SLOs drive perf baselines.</a:t>
             </a:r>
           </a:p>
         </p:txBody>

--- a/week-04/presentations/ppts/day-05-technical-tradeoffs-constraints.pptx
+++ b/week-04/presentations/ppts/day-05-technical-tradeoffs-constraints.pptx
@@ -545,7 +545,7 @@
             </a:pPr>
             <a:r>
               <a:rPr/>
-              <a:t>Friday. The TCD ships today, sibling to the PRD. Today produces §§5–6 + the integration pass.</a:t>
+              <a:t>Friday. The TCD ships today, sibling to the PRD. Today produces Sections 5–6 + the integration pass.</a:t>
             </a:r>
           </a:p>
         </p:txBody>
@@ -627,7 +627,7 @@
             </a:pPr>
             <a:r>
               <a:rPr/>
-              <a:t>Note how this links §3 (audit), §4 (latency SLO), and §5 (the trade-off) — internal consistency.</a:t>
+              <a:t>Note how this links Section 3 (audit), Section 4 (latency SLO), and Section 5 (the trade-off) — internal consistency.</a:t>
             </a:r>
           </a:p>
         </p:txBody>
@@ -5641,7 +5641,7 @@
             </a:pPr>
             <a:r>
               <a:rPr/>
-              <a:t>§1 Architecture stance</a:t>
+              <a:t>Section 1 Architecture stance</a:t>
             </a:r>
           </a:p>
           <a:p>
@@ -5686,7 +5686,7 @@
             </a:pPr>
             <a:r>
               <a:rPr/>
-              <a:t>§3 Threat model</a:t>
+              <a:t>Section 3 Threat model</a:t>
             </a:r>
           </a:p>
           <a:p>
@@ -5731,7 +5731,7 @@
             </a:pPr>
             <a:r>
               <a:rPr/>
-              <a:t>§3 SOC 2 retention</a:t>
+              <a:t>Section 3 SOC 2 retention</a:t>
             </a:r>
           </a:p>
           <a:p>
@@ -5776,7 +5776,7 @@
             </a:pPr>
             <a:r>
               <a:rPr/>
-              <a:t>§4 Latency SLO</a:t>
+              <a:t>Section 4 Latency SLO</a:t>
             </a:r>
           </a:p>
           <a:p>
@@ -5821,7 +5821,7 @@
             </a:pPr>
             <a:r>
               <a:rPr/>
-              <a:t>§4 Rate-limit policy</a:t>
+              <a:t>Section 4 Rate-limit policy</a:t>
             </a:r>
           </a:p>
           <a:p>
@@ -5866,7 +5866,7 @@
             </a:pPr>
             <a:r>
               <a:rPr/>
-              <a:t>§5 Trade-off 1</a:t>
+              <a:t>Section 5 Trade-off 1</a:t>
             </a:r>
           </a:p>
           <a:p>
@@ -6385,7 +6385,7 @@
             </a:pPr>
             <a:r>
               <a:rPr/>
-              <a:t>§1 stance ↔ §2 diagrams</a:t>
+              <a:t>Section 1 stance ↔ Section 2 diagrams</a:t>
             </a:r>
           </a:p>
           <a:p>
@@ -6403,7 +6403,7 @@
             </a:pPr>
             <a:r>
               <a:rPr/>
-              <a:t>§2 integrations ↔ §3 threats</a:t>
+              <a:t>Section 2 integrations ↔ Section 3 threats</a:t>
             </a:r>
           </a:p>
           <a:p>
@@ -6421,43 +6421,43 @@
             </a:pPr>
             <a:r>
               <a:rPr/>
-              <a:t>§3 NFRs ↔ §4 SLOs</a:t>
-            </a:r>
-          </a:p>
-          <a:p>
-            <a:pPr lvl="0" indent="0" marL="0">
-              <a:buNone/>
-            </a:pPr>
-            <a:r>
-              <a:rPr/>
-              <a:t>Conflicts surface as §5 trade-offs</a:t>
-            </a:r>
-          </a:p>
-          <a:p>
-            <a:pPr lvl="0" indent="0" marL="0">
-              <a:buNone/>
-            </a:pPr>
-            <a:r>
-              <a:rPr/>
-              <a:t>§4 SLOs ↔ §5 trade-offs</a:t>
-            </a:r>
-          </a:p>
-          <a:p>
-            <a:pPr lvl="0" indent="0" marL="0">
-              <a:buNone/>
-            </a:pPr>
-            <a:r>
-              <a:rPr/>
-              <a:t>Latency cost appears in §5 if accepted</a:t>
-            </a:r>
-          </a:p>
-          <a:p>
-            <a:pPr lvl="0" indent="0" marL="0">
-              <a:buNone/>
-            </a:pPr>
-            <a:r>
-              <a:rPr/>
-              <a:t>§§1–5 ↔ §6 stakeholders</a:t>
+              <a:t>Section 3 NFRs ↔ Section 4 SLOs</a:t>
+            </a:r>
+          </a:p>
+          <a:p>
+            <a:pPr lvl="0" indent="0" marL="0">
+              <a:buNone/>
+            </a:pPr>
+            <a:r>
+              <a:rPr/>
+              <a:t>Conflicts surface as Section 5 trade-offs</a:t>
+            </a:r>
+          </a:p>
+          <a:p>
+            <a:pPr lvl="0" indent="0" marL="0">
+              <a:buNone/>
+            </a:pPr>
+            <a:r>
+              <a:rPr/>
+              <a:t>Section 4 SLOs ↔ Section 5 trade-offs</a:t>
+            </a:r>
+          </a:p>
+          <a:p>
+            <a:pPr lvl="0" indent="0" marL="0">
+              <a:buNone/>
+            </a:pPr>
+            <a:r>
+              <a:rPr/>
+              <a:t>Latency cost appears in Section 5 if accepted</a:t>
+            </a:r>
+          </a:p>
+          <a:p>
+            <a:pPr lvl="0" indent="0" marL="0">
+              <a:buNone/>
+            </a:pPr>
+            <a:r>
+              <a:rPr/>
+              <a:t>Sections 1–5 ↔ Section 6 stakeholders</a:t>
             </a:r>
           </a:p>
           <a:p>
@@ -7276,7 +7276,7 @@
             </a:pPr>
             <a:r>
               <a:rPr/>
-              <a:t>Run an integration pass across §§1–6</a:t>
+              <a:t>Run an integration pass across Sections 1–6</a:t>
             </a:r>
           </a:p>
           <a:p>
@@ -7402,7 +7402,7 @@
             </a:pPr>
             <a:r>
               <a:rPr/>
-              <a:t>Pin TCD §§1–4 on the wall</a:t>
+              <a:t>Pin TCD Sections 1–4 on the wall</a:t>
             </a:r>
           </a:p>
           <a:p>
@@ -7957,7 +7957,7 @@
             </a:pPr>
             <a:r>
               <a:rPr/>
-              <a:t>Brainstorm 8–10 candidates from §§1–4. Categorize. Cull to 5 finalists. Rough out structure.</a:t>
+              <a:t>Brainstorm 8–10 candidates from Sections 1–4. Categorize. Cull to 5 finalists. Rough out structure.</a:t>
             </a:r>
           </a:p>
           <a:p>
@@ -8077,7 +8077,7 @@
             </a:pPr>
             <a:r>
               <a:rPr b="1"/>
-              <a:t>Final TCD §5 prose</a:t>
+              <a:t>Final TCD Section 5 prose</a:t>
             </a:r>
           </a:p>
         </p:txBody>

--- a/week-04/presentations/ppts/day-05-technical-tradeoffs-constraints.pptx
+++ b/week-04/presentations/ppts/day-05-technical-tradeoffs-constraints.pptx
@@ -5334,6 +5334,31 @@
           </a:p>
         </p:txBody>
       </p:sp>
+      <p:sp>
+        <p:nvSpPr>
+          <p:cNvPr id="3" name="Content Placeholder 2"/>
+          <p:cNvSpPr>
+            <a:spLocks noGrp="1"/>
+          </p:cNvSpPr>
+          <p:nvPr>
+            <p:ph idx="1"/>
+          </p:nvPr>
+        </p:nvSpPr>
+        <p:spPr/>
+        <p:txBody>
+          <a:bodyPr/>
+          <a:lstStyle/>
+          <a:p>
+            <a:pPr lvl="0" indent="0" marL="0">
+              <a:buNone/>
+            </a:pPr>
+            <a:r>
+              <a:rPr/>
+              <a:t>Option B leans on a dead-letter queue (DLQ) to catch rare write failures.</a:t>
+            </a:r>
+          </a:p>
+        </p:txBody>
+      </p:sp>
     </p:spTree>
   </p:cSld>
 </p:sld>
@@ -5587,6 +5612,15 @@
             </a:pPr>
             <a:r>
               <a:rPr/>
+              <a:t>Each row pairs a constraint with an owner — down to the single sign-on (SSO) scope addition.</a:t>
+            </a:r>
+          </a:p>
+          <a:p>
+            <a:pPr lvl="0" indent="0" marL="0">
+              <a:buNone/>
+            </a:pPr>
+            <a:r>
+              <a:rPr/>
               <a:t>#</a:t>
             </a:r>
           </a:p>
@@ -6574,7 +6608,7 @@
             </a:pPr>
             <a:r>
               <a:rPr/>
-              <a:t>Are SLOs and trade-offs internally consistent?</a:t>
+              <a:t>Are Service Level Objectives (SLOs) and trade-offs internally consistent?</a:t>
             </a:r>
           </a:p>
           <a:p>
@@ -6994,7 +7028,7 @@
             </a:pPr>
             <a:r>
               <a:rPr/>
-              <a:t>STRIDE threat model + security NFRs</a:t>
+              <a:t>STRIDE threat model (six threat categories) + security non-functional requirements (NFRs)</a:t>
             </a:r>
           </a:p>
           <a:p>
@@ -7285,7 +7319,7 @@
             </a:pPr>
             <a:r>
               <a:rPr/>
-              <a:t>Cross-review with another triad and ship the TCD as a sibling to the PRD</a:t>
+              <a:t>Cross-review with another triad and ship the Technical Concept Document (TCD) as a sibling to the Product Requirements Document (PRD)</a:t>
             </a:r>
           </a:p>
         </p:txBody>

--- a/week-04/presentations/ppts/day-05-technical-tradeoffs-constraints.pptx
+++ b/week-04/presentations/ppts/day-05-technical-tradeoffs-constraints.pptx
@@ -5963,7 +5963,7 @@
             </a:pPr>
             <a:r>
               <a:rPr/>
-              <a:t>Confirmed</a:t>
+              <a:t>Approved</a:t>
             </a:r>
           </a:p>
           <a:p>

--- a/week-04/presentations/ppts/day-05-technical-tradeoffs-constraints.pptx
+++ b/week-04/presentations/ppts/day-05-technical-tradeoffs-constraints.pptx
@@ -5277,6 +5277,24 @@
           <a:bodyPr/>
           <a:lstStyle/>
           <a:p>
+            <a:pPr lvl="0" indent="0">
+              <a:buNone/>
+            </a:pPr>
+            <a:r>
+              <a:rPr>
+                <a:latin typeface="Courier"/>
+              </a:rPr>
+              <a:t>### Trade-off N — &lt;short name&gt;
+**Tension:** &lt;category&gt; — &lt;framing in one sentence&gt;
+**Option A:** &lt;1–2 sentences&gt;
+**Option B:** &lt;1–2 sentences&gt;
+**Choice:** Option A.
+**Why:** &lt;2–3 sentences — defended in business + operational terms&gt;
+**Accepted cost:** &lt;what we give up, concretely&gt;
+**Revisit trigger:** &lt;metric or organizational change&gt;</a:t>
+            </a:r>
+          </a:p>
+          <a:p>
             <a:pPr lvl="0" indent="0" marL="0">
               <a:buNone/>
             </a:pPr>
@@ -5348,6 +5366,33 @@
         <p:txBody>
           <a:bodyPr/>
           <a:lstStyle/>
+          <a:p>
+            <a:pPr lvl="0" indent="0">
+              <a:buNone/>
+            </a:pPr>
+            <a:r>
+              <a:rPr>
+                <a:latin typeface="Courier"/>
+              </a:rPr>
+              <a:t>### Trade-off 2 — Sync vs async write to audit
+**Tension:** Latency vs durability.
+**Option A:** Synchronous write to audit event store
+before responding to user.
+**Option B:** Async publish to Event Hubs audit stream;
+consumer writes to store.
+**Choice:** Option B.
+**Why:** Synchronous would add 30–80ms to the reconcile
+latency budget, breaking the p95 ≤ 1000ms SLO. Async
+with Event Hubs durability is sufficient for SOC 2 audit
+requirements. The DLQ on the consumer handles rare
+write failures.
+**Accepted cost:** Audit events may lag 1–10s behind user
+action; a regulator querying within seconds may see
+stale state.
+**Revisit trigger:** A regulator or customer requires
+synchronous audit visibility within &lt; 1 second.</a:t>
+            </a:r>
+          </a:p>
           <a:p>
             <a:pPr lvl="0" indent="0" marL="0">
               <a:buNone/>

--- a/week-04/presentations/ppts/day-05-technical-tradeoffs-constraints.pptx
+++ b/week-04/presentations/ppts/day-05-technical-tradeoffs-constraints.pptx
@@ -791,7 +791,7 @@
             </a:pPr>
             <a:r>
               <a:rPr/>
-              <a:t>Real names, real next steps. Aim for 6+ entries — most architectural features touch that many stakeholders even if triads under-count at first.</a:t>
+              <a:t>Real names, real next steps. Aim for 6+ entries — most architectural features touch that many stakeholders even if quads under-count at first.</a:t>
             </a:r>
           </a:p>
         </p:txBody>
@@ -873,7 +873,7 @@
             </a:pPr>
             <a:r>
               <a:rPr/>
-              <a:t>“TBD” is not allowed. If a triad doesn’t know who, ask “who would be angry if you shipped without telling them?”</a:t>
+              <a:t>“TBD” is not allowed. If a quad doesn’t know who, ask “who would be angry if you shipped without telling them?”</a:t>
             </a:r>
           </a:p>
         </p:txBody>
@@ -955,7 +955,7 @@
             </a:pPr>
             <a:r>
               <a:rPr/>
-              <a:t>Triads who claim everything is “Approved” haven’t done the work. Push back.</a:t>
+              <a:t>Quads who claim everything is “Approved” haven’t done the work. Push back.</a:t>
             </a:r>
           </a:p>
         </p:txBody>
@@ -1365,7 +1365,7 @@
             </a:pPr>
             <a:r>
               <a:rPr/>
-              <a:t>Wrap-share: each triad shares one of their five trade-offs aloud, including the revisit trigger.</a:t>
+              <a:t>Wrap-share: each quad shares one of their five trade-offs aloud, including the revisit trigger.</a:t>
             </a:r>
           </a:p>
         </p:txBody>
@@ -1529,7 +1529,7 @@
             </a:pPr>
             <a:r>
               <a:rPr/>
-              <a:t>Round-robin close: each triad names the trade-off they expect a real architect to push hardest on.</a:t>
+              <a:t>Round-robin close: each quad names the trade-off they expect a real architect to push hardest on.</a:t>
             </a:r>
           </a:p>
         </p:txBody>
@@ -1775,7 +1775,7 @@
             </a:pPr>
             <a:r>
               <a:rPr/>
-              <a:t>Trade-offs hide everywhere — in the stance, the diagram, the SLOs. Triads have to surface 8+ candidates before they can cull to the strongest five.</a:t>
+              <a:t>Trade-offs hide everywhere — in the stance, the diagram, the SLOs. Quads have to surface 8+ candidates before they can cull to the strongest five.</a:t>
             </a:r>
           </a:p>
         </p:txBody>
@@ -1939,7 +1939,7 @@
             </a:pPr>
             <a:r>
               <a:rPr/>
-              <a:t>The category check is a quick filter for whether the triad surfaced real tensions.</a:t>
+              <a:t>The category check is a quick filter for whether the quad surfaced real tensions.</a:t>
             </a:r>
           </a:p>
         </p:txBody>
@@ -5474,7 +5474,7 @@
             </a:pPr>
             <a:r>
               <a:rPr b="1"/>
-              <a:t>Triads • 40 minutes</a:t>
+              <a:t>Quads • 40 minutes</a:t>
             </a:r>
           </a:p>
           <a:p>
@@ -6254,7 +6254,7 @@
             </a:pPr>
             <a:r>
               <a:rPr b="1"/>
-              <a:t>Triads • 40 minutes</a:t>
+              <a:t>Quads • 40 minutes</a:t>
             </a:r>
           </a:p>
           <a:p>
@@ -6938,7 +6938,7 @@
             </a:pPr>
             <a:r>
               <a:rPr b="1"/>
-              <a:t>Triads • 45 minutes • Wrap</a:t>
+              <a:t>Quads • 45 minutes • Wrap</a:t>
             </a:r>
           </a:p>
           <a:p>
@@ -6956,7 +6956,7 @@
             </a:pPr>
             <a:r>
               <a:rPr/>
-              <a:t>20 min: cross-review with another triad (rubric)</a:t>
+              <a:t>20 min: cross-review with another quad (rubric)</a:t>
             </a:r>
           </a:p>
           <a:p>
@@ -7364,7 +7364,7 @@
             </a:pPr>
             <a:r>
               <a:rPr/>
-              <a:t>Cross-review with another triad and ship the Technical Concept Document (TCD) as a sibling to the Product Requirements Document (PRD)</a:t>
+              <a:t>Cross-review with another quad and ship the Technical Concept Document (TCD) as a sibling to the Product Requirements Document (PRD)</a:t>
             </a:r>
           </a:p>
         </p:txBody>
@@ -8027,7 +8027,7 @@
             </a:pPr>
             <a:r>
               <a:rPr b="1"/>
-              <a:t>Triads • 35 minutes</a:t>
+              <a:t>Quads • 35 minutes</a:t>
             </a:r>
           </a:p>
           <a:p>

--- a/week-04/presentations/ppts/day-05-technical-tradeoffs-constraints.pptx
+++ b/week-04/presentations/ppts/day-05-technical-tradeoffs-constraints.pptx
@@ -5474,7 +5474,7 @@
             </a:pPr>
             <a:r>
               <a:rPr b="1"/>
-              <a:t>Quads • 40 minutes</a:t>
+              <a:t>Quads • 50 minutes</a:t>
             </a:r>
           </a:p>
           <a:p>
@@ -6254,7 +6254,7 @@
             </a:pPr>
             <a:r>
               <a:rPr b="1"/>
-              <a:t>Quads • 40 minutes</a:t>
+              <a:t>Quads • 50 minutes</a:t>
             </a:r>
           </a:p>
           <a:p>
@@ -6938,7 +6938,7 @@
             </a:pPr>
             <a:r>
               <a:rPr b="1"/>
-              <a:t>Quads • 45 minutes • Wrap</a:t>
+              <a:t>Quads • 55 minutes • Wrap</a:t>
             </a:r>
           </a:p>
           <a:p>
@@ -8027,7 +8027,7 @@
             </a:pPr>
             <a:r>
               <a:rPr b="1"/>
-              <a:t>Quads • 35 minutes</a:t>
+              <a:t>Quads • 45 minutes</a:t>
             </a:r>
           </a:p>
           <a:p>

--- a/week-04/presentations/ppts/day-05-technical-tradeoffs-constraints.pptx
+++ b/week-04/presentations/ppts/day-05-technical-tradeoffs-constraints.pptx
@@ -5483,7 +5483,7 @@
             </a:pPr>
             <a:r>
               <a:rPr/>
-              <a:t>15 min: solo drafts (each member writes 2)</a:t>
+              <a:t>25 min: solo drafts (each member writes 2)</a:t>
             </a:r>
           </a:p>
           <a:p>
@@ -5510,7 +5510,7 @@
             </a:pPr>
             <a:r>
               <a:rPr/>
-              <a:t>⏱ 15 + 15 + 10</a:t>
+              <a:t>⏱ 25 + 15 + 10</a:t>
             </a:r>
           </a:p>
         </p:txBody>
@@ -6263,7 +6263,7 @@
             </a:pPr>
             <a:r>
               <a:rPr/>
-              <a:t>15 min: list every constraint needing sign-off</a:t>
+              <a:t>25 min: list every constraint needing sign-off</a:t>
             </a:r>
           </a:p>
           <a:p>
@@ -6299,7 +6299,7 @@
             </a:pPr>
             <a:r>
               <a:rPr/>
-              <a:t>⏱ 15 + 10 + 10 + 5</a:t>
+              <a:t>⏱ 25 + 10 + 10 + 5</a:t>
             </a:r>
           </a:p>
         </p:txBody>
@@ -6956,7 +6956,7 @@
             </a:pPr>
             <a:r>
               <a:rPr/>
-              <a:t>20 min: cross-review with another quad (rubric)</a:t>
+              <a:t>30 min: cross-review with another quad (rubric)</a:t>
             </a:r>
           </a:p>
           <a:p>
@@ -6974,7 +6974,7 @@
             </a:pPr>
             <a:r>
               <a:rPr/>
-              <a:t>⏱ 10 + 20 + 15 · 15-min wrap-share</a:t>
+              <a:t>⏱ 10 + 30 + 15 · 15-min wrap-share</a:t>
             </a:r>
           </a:p>
         </p:txBody>
@@ -8045,7 +8045,7 @@
             </a:pPr>
             <a:r>
               <a:rPr/>
-              <a:t>15 min: brainstorm 8–10</a:t>
+              <a:t>25 min: brainstorm 8–10</a:t>
             </a:r>
           </a:p>
           <a:p>
@@ -8081,7 +8081,7 @@
             </a:pPr>
             <a:r>
               <a:rPr/>
-              <a:t>⏱ 15 + 5 + 10 + 5</a:t>
+              <a:t>⏱ 25 + 5 + 10 + 5</a:t>
             </a:r>
           </a:p>
         </p:txBody>
